--- a/Y9_Exploring_Science/9C_Threat_from_disease/9C_L01_Threat_from_disease.pptx
+++ b/Y9_Exploring_Science/9C_Threat_from_disease/9C_L01_Threat_from_disease.pptx
@@ -1651,7 +1651,7 @@
         <p:spPr>
           <a:xfrm>
             <a:off x="548640" y="3657600"/>
-            <a:ext cx="10515600" cy="914400"/>
+            <a:ext cx="10515600" cy="1097280"/>
           </a:xfrm>
           <a:prstGeom prst="rect">
             <a:avLst/>
@@ -1664,7 +1664,7 @@
           <a:lstStyle>
             <a:lvl1pPr indent="0" marL="0">
               <a:buNone/>
-              <a:defRPr lang="en-US" sz="2000" dirty="0">
+              <a:defRPr lang="en-US" sz="2400" dirty="0">
                 <a:solidFill>
                   <a:srgbClr val="FFFFFF"/>
                 </a:solidFill>
@@ -1675,7 +1675,7 @@
             <a:pPr indent="0" marL="0">
               <a:buNone/>
             </a:pPr>
-            <a:endParaRPr lang="en-US" sz="2000" dirty="0"/>
+            <a:endParaRPr lang="en-US" sz="2400" dirty="0"/>
           </a:p>
         </p:txBody>
       </p:sp>
@@ -1775,14 +1775,14 @@
               <a:buNone/>
             </a:pPr>
             <a:r>
-              <a:rPr lang="en-US" sz="900" dirty="0">
+              <a:rPr lang="en-US" sz="1000" dirty="0">
                 <a:solidFill>
                   <a:srgbClr val="5B6574"/>
                 </a:solidFill>
               </a:rPr>
               <a:t>Year 9 Science  |  9C Threat from disease  |  Lesson 1: Threat from disease</a:t>
             </a:r>
-            <a:endParaRPr lang="en-US" sz="900" dirty="0"/>
+            <a:endParaRPr lang="en-US" sz="1000" dirty="0"/>
           </a:p>
         </p:txBody>
       </p:sp>
@@ -1951,14 +1951,14 @@
               <a:buNone/>
             </a:pPr>
             <a:r>
-              <a:rPr lang="en-US" sz="900" dirty="0">
+              <a:rPr lang="en-US" sz="1000" dirty="0">
                 <a:solidFill>
                   <a:srgbClr val="5B6574"/>
                 </a:solidFill>
               </a:rPr>
               <a:t>Year 9 Science  |  9C Threat from disease  |  Lesson 1: Threat from disease</a:t>
             </a:r>
-            <a:endParaRPr lang="en-US" sz="900" dirty="0"/>
+            <a:endParaRPr lang="en-US" sz="1000" dirty="0"/>
           </a:p>
         </p:txBody>
       </p:sp>
@@ -2127,14 +2127,14 @@
               <a:buNone/>
             </a:pPr>
             <a:r>
-              <a:rPr lang="en-US" sz="900" dirty="0">
+              <a:rPr lang="en-US" sz="1000" dirty="0">
                 <a:solidFill>
                   <a:srgbClr val="5B6574"/>
                 </a:solidFill>
               </a:rPr>
               <a:t>Year 9 Science  |  9C Threat from disease  |  Lesson 1: Threat from disease</a:t>
             </a:r>
-            <a:endParaRPr lang="en-US" sz="900" dirty="0"/>
+            <a:endParaRPr lang="en-US" sz="1000" dirty="0"/>
           </a:p>
         </p:txBody>
       </p:sp>
@@ -2263,7 +2263,7 @@
           <a:lstStyle>
             <a:lvl1pPr indent="0" marL="0">
               <a:buNone/>
-              <a:defRPr lang="en-US" sz="3000" b="1" dirty="0">
+              <a:defRPr lang="en-US" sz="3400" b="1" dirty="0">
                 <a:solidFill>
                   <a:srgbClr val="3A2E00"/>
                 </a:solidFill>
@@ -2274,7 +2274,7 @@
             <a:pPr indent="0" marL="0">
               <a:buNone/>
             </a:pPr>
-            <a:endParaRPr lang="en-US" sz="3000" dirty="0"/>
+            <a:endParaRPr lang="en-US" sz="3400" dirty="0"/>
           </a:p>
         </p:txBody>
       </p:sp>
@@ -2691,14 +2691,14 @@
               <a:buNone/>
             </a:pPr>
             <a:r>
-              <a:rPr lang="en-US" sz="1300" b="1" spc="200" kern="0" dirty="0">
+              <a:rPr lang="en-US" sz="1400" b="1" spc="200" kern="0" dirty="0">
                 <a:solidFill>
                   <a:srgbClr val="F2CE3E"/>
                 </a:solidFill>
               </a:rPr>
               <a:t>YEAR 9 SCIENCE  ·  9C THREAT FROM DISEASE  ·  LESSON 1 OF 7</a:t>
             </a:r>
-            <a:endParaRPr lang="en-US" sz="1300" dirty="0"/>
+            <a:endParaRPr lang="en-US" sz="1400" dirty="0"/>
           </a:p>
         </p:txBody>
       </p:sp>
@@ -2751,7 +2751,7 @@
         <p:spPr>
           <a:xfrm>
             <a:off x="548640" y="3657600"/>
-            <a:ext cx="10515600" cy="914400"/>
+            <a:ext cx="10515600" cy="1097280"/>
           </a:xfrm>
           <a:prstGeom prst="rect">
             <a:avLst/>
@@ -2767,14 +2767,14 @@
               <a:buNone/>
             </a:pPr>
             <a:r>
-              <a:rPr lang="en-US" sz="2000" dirty="0">
+              <a:rPr lang="en-US" sz="2400" dirty="0">
                 <a:solidFill>
                   <a:srgbClr val="FFFFFF"/>
                 </a:solidFill>
               </a:rPr>
               <a:t>What makes us ill, and why do we live so much longer than people did 180 years ago?</a:t>
             </a:r>
-            <a:endParaRPr lang="en-US" sz="2000" dirty="0"/>
+            <a:endParaRPr lang="en-US" sz="2400" dirty="0"/>
           </a:p>
         </p:txBody>
       </p:sp>
@@ -2803,14 +2803,14 @@
               <a:buNone/>
             </a:pPr>
             <a:r>
-              <a:rPr lang="en-US" sz="1200" dirty="0">
+              <a:rPr lang="en-US" sz="1400" dirty="0">
                 <a:solidFill>
                   <a:srgbClr val="C9D3E6"/>
                 </a:solidFill>
               </a:rPr>
               <a:t>Exploring Science International 9  ·  Student Book pages 37 to 38  ·  Workbook pages 27 to 28</a:t>
             </a:r>
-            <a:endParaRPr lang="en-US" sz="1200" dirty="0"/>
+            <a:endParaRPr lang="en-US" sz="1400" dirty="0"/>
           </a:p>
         </p:txBody>
       </p:sp>
@@ -2982,23 +2982,21 @@
           <a:ln/>
         </p:spPr>
         <p:txBody>
-          <a:bodyPr wrap="square" lIns="0" tIns="0" rIns="0" bIns="0" rtlCol="0" anchor="t">
-            <a:normAutofit/>
-          </a:bodyPr>
+          <a:bodyPr wrap="square" lIns="0" tIns="0" rIns="0" bIns="0" rtlCol="0" anchor="t"/>
           <a:lstStyle/>
           <a:p>
             <a:pPr indent="0" marL="0">
               <a:buNone/>
             </a:pPr>
             <a:r>
-              <a:rPr lang="en-US" sz="2200" b="1" dirty="0">
+              <a:rPr lang="en-US" sz="2600" b="1" dirty="0">
                 <a:solidFill>
                   <a:srgbClr val="0F2A5F"/>
                 </a:solidFill>
               </a:rPr>
               <a:t>In richer countries, the main causes of death are now non-communicable diseases such as heart disease and cancer, not infections. Why has this changed over the last 180 years?</a:t>
             </a:r>
-            <a:endParaRPr lang="en-US" sz="2200" dirty="0"/>
+            <a:endParaRPr lang="en-US" sz="2600" dirty="0"/>
           </a:p>
         </p:txBody>
       </p:sp>
@@ -3047,9 +3045,7 @@
           <a:ln/>
         </p:spPr>
         <p:txBody>
-          <a:bodyPr wrap="square" lIns="0" tIns="0" rIns="0" bIns="0" rtlCol="0" anchor="t">
-            <a:normAutofit/>
-          </a:bodyPr>
+          <a:bodyPr wrap="square" lIns="0" tIns="0" rIns="0" bIns="0" rtlCol="0" anchor="t"/>
           <a:lstStyle/>
           <a:p>
             <a:pPr indent="0" marL="0">
@@ -3059,14 +3055,14 @@
               <a:buNone/>
             </a:pPr>
             <a:r>
-              <a:rPr lang="en-US" sz="1500" b="1" dirty="0">
+              <a:rPr lang="en-US" sz="1800" b="1" dirty="0">
                 <a:solidFill>
                   <a:srgbClr val="7B3A8E"/>
                 </a:solidFill>
               </a:rPr>
               <a:t>Sentence frames</a:t>
             </a:r>
-            <a:endParaRPr lang="en-US" sz="1500" dirty="0"/>
+            <a:endParaRPr lang="en-US" sz="1800" dirty="0"/>
           </a:p>
           <a:p>
             <a:pPr indent="0" marL="0">
@@ -3076,14 +3072,14 @@
               <a:buNone/>
             </a:pPr>
             <a:r>
-              <a:rPr lang="en-US" sz="1500" dirty="0">
+              <a:rPr lang="en-US" sz="1800" dirty="0">
                 <a:solidFill>
                   <a:srgbClr val="141B26"/>
                 </a:solidFill>
               </a:rPr>
               <a:t>Fewer people die from infections because ___.</a:t>
             </a:r>
-            <a:endParaRPr lang="en-US" sz="1500" dirty="0"/>
+            <a:endParaRPr lang="en-US" sz="1800" dirty="0"/>
           </a:p>
           <a:p>
             <a:pPr indent="0" marL="0">
@@ -3093,14 +3089,14 @@
               <a:buNone/>
             </a:pPr>
             <a:r>
-              <a:rPr lang="en-US" sz="1500" dirty="0">
+              <a:rPr lang="en-US" sz="1800" dirty="0">
                 <a:solidFill>
                   <a:srgbClr val="141B26"/>
                 </a:solidFill>
               </a:rPr>
               <a:t>More people now die from ___ because they live long enough to ___.</a:t>
             </a:r>
-            <a:endParaRPr lang="en-US" sz="1500" dirty="0"/>
+            <a:endParaRPr lang="en-US" sz="1800" dirty="0"/>
           </a:p>
           <a:p>
             <a:pPr indent="0" marL="0">
@@ -3110,14 +3106,14 @@
               <a:buNone/>
             </a:pPr>
             <a:r>
-              <a:rPr lang="en-US" sz="1500" dirty="0">
+              <a:rPr lang="en-US" sz="1800" dirty="0">
                 <a:solidFill>
                   <a:srgbClr val="141B26"/>
                 </a:solidFill>
               </a:rPr>
               <a:t>One thing we could do about lifestyle diseases is ___.</a:t>
             </a:r>
-            <a:endParaRPr lang="en-US" sz="1500" dirty="0"/>
+            <a:endParaRPr lang="en-US" sz="1800" dirty="0"/>
           </a:p>
         </p:txBody>
       </p:sp>
@@ -3317,14 +3313,14 @@
               <a:buNone/>
             </a:pPr>
             <a:r>
-              <a:rPr lang="en-US" sz="1400" i="1" dirty="0">
+              <a:rPr lang="en-US" sz="1600" i="1" dirty="0">
                 <a:solidFill>
                   <a:srgbClr val="5B6574"/>
                 </a:solidFill>
               </a:rPr>
               <a:t>On your worksheet exit ticket. Work alone. Hand it in as you leave.</a:t>
             </a:r>
-            <a:endParaRPr lang="en-US" sz="1400" dirty="0"/>
+            <a:endParaRPr lang="en-US" sz="1600" dirty="0"/>
           </a:p>
         </p:txBody>
       </p:sp>
@@ -3337,25 +3333,23 @@
         <p:spPr>
           <a:xfrm>
             <a:off x="548640" y="1828800"/>
-            <a:ext cx="10881360" cy="1188720"/>
-          </a:xfrm>
-          <a:prstGeom prst="rect">
-            <a:avLst/>
-          </a:prstGeom>
-          <a:noFill/>
-          <a:ln/>
-        </p:spPr>
-        <p:txBody>
-          <a:bodyPr wrap="square" lIns="0" tIns="0" rIns="0" bIns="0" rtlCol="0" anchor="t">
-            <a:normAutofit/>
-          </a:bodyPr>
+            <a:ext cx="9692640" cy="1188720"/>
+          </a:xfrm>
+          <a:prstGeom prst="rect">
+            <a:avLst/>
+          </a:prstGeom>
+          <a:noFill/>
+          <a:ln/>
+        </p:spPr>
+        <p:txBody>
+          <a:bodyPr wrap="square" lIns="0" tIns="0" rIns="0" bIns="0" rtlCol="0" anchor="t"/>
           <a:lstStyle/>
           <a:p>
             <a:pPr indent="0" marL="0">
               <a:buNone/>
             </a:pPr>
             <a:r>
-              <a:rPr lang="en-US" sz="1800" b="1" dirty="0">
+              <a:rPr lang="en-US" sz="2200" b="1" dirty="0">
                 <a:solidFill>
                   <a:srgbClr val="7B3A8E"/>
                 </a:solidFill>
@@ -3366,14 +3360,14 @@
               <a:buNone/>
             </a:pPr>
             <a:r>
-              <a:rPr lang="en-US" sz="1800" dirty="0">
+              <a:rPr lang="en-US" sz="2200" dirty="0">
                 <a:solidFill>
                   <a:srgbClr val="141B26"/>
                 </a:solidFill>
               </a:rPr>
               <a:t>What is a pathogen?</a:t>
             </a:r>
-            <a:endParaRPr lang="en-US" sz="1800" dirty="0"/>
+            <a:endParaRPr lang="en-US" sz="2200" dirty="0"/>
           </a:p>
         </p:txBody>
       </p:sp>
@@ -3386,25 +3380,23 @@
         <p:spPr>
           <a:xfrm>
             <a:off x="548640" y="3017520"/>
-            <a:ext cx="10881360" cy="1188720"/>
-          </a:xfrm>
-          <a:prstGeom prst="rect">
-            <a:avLst/>
-          </a:prstGeom>
-          <a:noFill/>
-          <a:ln/>
-        </p:spPr>
-        <p:txBody>
-          <a:bodyPr wrap="square" lIns="0" tIns="0" rIns="0" bIns="0" rtlCol="0" anchor="t">
-            <a:normAutofit/>
-          </a:bodyPr>
+            <a:ext cx="9692640" cy="1188720"/>
+          </a:xfrm>
+          <a:prstGeom prst="rect">
+            <a:avLst/>
+          </a:prstGeom>
+          <a:noFill/>
+          <a:ln/>
+        </p:spPr>
+        <p:txBody>
+          <a:bodyPr wrap="square" lIns="0" tIns="0" rIns="0" bIns="0" rtlCol="0" anchor="t"/>
           <a:lstStyle/>
           <a:p>
             <a:pPr indent="0" marL="0">
               <a:buNone/>
             </a:pPr>
             <a:r>
-              <a:rPr lang="en-US" sz="1800" b="1" dirty="0">
+              <a:rPr lang="en-US" sz="2200" b="1" dirty="0">
                 <a:solidFill>
                   <a:srgbClr val="7B3A8E"/>
                 </a:solidFill>
@@ -3415,14 +3407,14 @@
               <a:buNone/>
             </a:pPr>
             <a:r>
-              <a:rPr lang="en-US" sz="1800" dirty="0">
+              <a:rPr lang="en-US" sz="2200" dirty="0">
                 <a:solidFill>
                   <a:srgbClr val="141B26"/>
                 </a:solidFill>
               </a:rPr>
               <a:t>Give one example of a non-communicable disease and explain why it is non-communicable.</a:t>
             </a:r>
-            <a:endParaRPr lang="en-US" sz="1800" dirty="0"/>
+            <a:endParaRPr lang="en-US" sz="2200" dirty="0"/>
           </a:p>
         </p:txBody>
       </p:sp>
@@ -3435,25 +3427,23 @@
         <p:spPr>
           <a:xfrm>
             <a:off x="548640" y="4206240"/>
-            <a:ext cx="10881360" cy="1188720"/>
-          </a:xfrm>
-          <a:prstGeom prst="rect">
-            <a:avLst/>
-          </a:prstGeom>
-          <a:noFill/>
-          <a:ln/>
-        </p:spPr>
-        <p:txBody>
-          <a:bodyPr wrap="square" lIns="0" tIns="0" rIns="0" bIns="0" rtlCol="0" anchor="t">
-            <a:normAutofit/>
-          </a:bodyPr>
+            <a:ext cx="9692640" cy="1188720"/>
+          </a:xfrm>
+          <a:prstGeom prst="rect">
+            <a:avLst/>
+          </a:prstGeom>
+          <a:noFill/>
+          <a:ln/>
+        </p:spPr>
+        <p:txBody>
+          <a:bodyPr wrap="square" lIns="0" tIns="0" rIns="0" bIns="0" rtlCol="0" anchor="t"/>
           <a:lstStyle/>
           <a:p>
             <a:pPr indent="0" marL="0">
               <a:buNone/>
             </a:pPr>
             <a:r>
-              <a:rPr lang="en-US" sz="1800" b="1" dirty="0">
+              <a:rPr lang="en-US" sz="2200" b="1" dirty="0">
                 <a:solidFill>
                   <a:srgbClr val="7B3A8E"/>
                 </a:solidFill>
@@ -3464,14 +3454,14 @@
               <a:buNone/>
             </a:pPr>
             <a:r>
-              <a:rPr lang="en-US" sz="1800" dirty="0">
+              <a:rPr lang="en-US" sz="2200" dirty="0">
                 <a:solidFill>
                   <a:srgbClr val="141B26"/>
                 </a:solidFill>
               </a:rPr>
               <a:t>Name two types of microorganism that can be pathogens.</a:t>
             </a:r>
-            <a:endParaRPr lang="en-US" sz="1800" dirty="0"/>
+            <a:endParaRPr lang="en-US" sz="2200" dirty="0"/>
           </a:p>
         </p:txBody>
       </p:sp>
@@ -3730,90 +3720,88 @@
         <p:spPr>
           <a:xfrm>
             <a:off x="548640" y="1371600"/>
-            <a:ext cx="10881360" cy="4480560"/>
-          </a:xfrm>
-          <a:prstGeom prst="rect">
-            <a:avLst/>
-          </a:prstGeom>
-          <a:noFill/>
-          <a:ln/>
-        </p:spPr>
-        <p:txBody>
-          <a:bodyPr wrap="square" lIns="0" tIns="0" rIns="0" bIns="0" rtlCol="0" anchor="t">
-            <a:normAutofit/>
-          </a:bodyPr>
+            <a:ext cx="10881360" cy="4114800"/>
+          </a:xfrm>
+          <a:prstGeom prst="rect">
+            <a:avLst/>
+          </a:prstGeom>
+          <a:noFill/>
+          <a:ln/>
+        </p:spPr>
+        <p:txBody>
+          <a:bodyPr wrap="square" lIns="0" tIns="0" rIns="0" bIns="0" rtlCol="0" anchor="t"/>
           <a:lstStyle/>
           <a:p>
             <a:pPr marL="342900" indent="-342900">
               <a:spcAft>
-                <a:spcPts val="1000"/>
+                <a:spcPts val="1200"/>
               </a:spcAft>
               <a:buSzPct val="100000"/>
               <a:buChar char="✓"/>
             </a:pPr>
             <a:r>
-              <a:rPr lang="en-US" sz="1700" dirty="0">
+              <a:rPr lang="en-US" sz="2000" dirty="0">
                 <a:solidFill>
                   <a:srgbClr val="141B26"/>
                 </a:solidFill>
               </a:rPr>
               <a:t>People live longer because of hygiene, better diet, immunisation and medicines.</a:t>
             </a:r>
-            <a:endParaRPr lang="en-US" sz="1700" dirty="0"/>
+            <a:endParaRPr lang="en-US" sz="2000" dirty="0"/>
           </a:p>
           <a:p>
             <a:pPr marL="342900" indent="-342900">
               <a:spcAft>
-                <a:spcPts val="1000"/>
+                <a:spcPts val="1200"/>
               </a:spcAft>
               <a:buSzPct val="100000"/>
               <a:buChar char="✓"/>
             </a:pPr>
             <a:r>
-              <a:rPr lang="en-US" sz="1700" dirty="0">
+              <a:rPr lang="en-US" sz="2000" dirty="0">
                 <a:solidFill>
                   <a:srgbClr val="141B26"/>
                 </a:solidFill>
               </a:rPr>
               <a:t>Pathogens are microorganisms (bacteria, viruses, fungi, protoctists) that cause infectious diseases.</a:t>
             </a:r>
-            <a:endParaRPr lang="en-US" sz="1700" dirty="0"/>
+            <a:endParaRPr lang="en-US" sz="2000" dirty="0"/>
           </a:p>
           <a:p>
             <a:pPr marL="342900" indent="-342900">
               <a:spcAft>
-                <a:spcPts val="1000"/>
+                <a:spcPts val="1200"/>
               </a:spcAft>
               <a:buSzPct val="100000"/>
               <a:buChar char="✓"/>
             </a:pPr>
             <a:r>
-              <a:rPr lang="en-US" sz="1700" dirty="0">
+              <a:rPr lang="en-US" sz="2000" dirty="0">
                 <a:solidFill>
                   <a:srgbClr val="141B26"/>
                 </a:solidFill>
               </a:rPr>
               <a:t>Deficiency, genetic, lifestyle and autoimmune diseases are non-communicable: they cannot be passed on.</a:t>
             </a:r>
-            <a:endParaRPr lang="en-US" sz="1700" dirty="0"/>
+            <a:endParaRPr lang="en-US" sz="2000" dirty="0"/>
           </a:p>
           <a:p>
             <a:pPr marL="342900" indent="-342900">
               <a:spcAft>
-                <a:spcPts val="1000"/>
+                <a:spcPts val="1200"/>
               </a:spcAft>
               <a:buSzPct val="100000"/>
               <a:buChar char="✓"/>
             </a:pPr>
             <a:r>
-              <a:rPr lang="en-US" sz="1700" dirty="0">
+              <a:rPr lang="en-US" sz="2000" dirty="0">
                 <a:solidFill>
                   <a:srgbClr val="141B26"/>
                 </a:solidFill>
               </a:rPr>
               <a:t>Symptoms are the obvious effects of a disease.</a:t>
             </a:r>
-            <a:endParaRPr lang="en-US" sz="1700" dirty="0"/>
+            <a:endParaRPr lang="en-US" sz="2000" dirty="0"/>
           </a:p>
         </p:txBody>
       </p:sp>
@@ -3842,7 +3830,7 @@
               <a:buNone/>
             </a:pPr>
             <a:r>
-              <a:rPr lang="en-US" sz="1300" b="1" dirty="0">
+              <a:rPr lang="en-US" sz="1400" b="1" dirty="0">
                 <a:solidFill>
                   <a:srgbClr val="7B3A8E"/>
                 </a:solidFill>
@@ -3853,14 +3841,14 @@
               <a:buNone/>
             </a:pPr>
             <a:r>
-              <a:rPr lang="en-US" sz="1300" dirty="0">
+              <a:rPr lang="en-US" sz="1400" dirty="0">
                 <a:solidFill>
                   <a:srgbClr val="141B26"/>
                 </a:solidFill>
               </a:rPr>
               <a:t>Immunity and vaccination: how white blood cells destroy pathogens, and why you only get measles once.</a:t>
             </a:r>
-            <a:endParaRPr lang="en-US" sz="1300" dirty="0"/>
+            <a:endParaRPr lang="en-US" sz="1400" dirty="0"/>
           </a:p>
         </p:txBody>
       </p:sp>
@@ -4128,77 +4116,75 @@
           <a:ln/>
         </p:spPr>
         <p:txBody>
-          <a:bodyPr wrap="square" lIns="0" tIns="0" rIns="0" bIns="0" rtlCol="0" anchor="t">
-            <a:normAutofit/>
-          </a:bodyPr>
+          <a:bodyPr wrap="square" lIns="0" tIns="0" rIns="0" bIns="0" rtlCol="0" anchor="t"/>
           <a:lstStyle/>
           <a:p>
             <a:pPr indent="0" marL="0">
               <a:spcAft>
-                <a:spcPts val="1000"/>
+                <a:spcPts val="1200"/>
               </a:spcAft>
               <a:buNone/>
             </a:pPr>
             <a:r>
-              <a:rPr lang="en-US" sz="2000" dirty="0">
+              <a:rPr lang="en-US" sz="2400" dirty="0">
                 <a:solidFill>
                   <a:srgbClr val="141B26"/>
                 </a:solidFill>
               </a:rPr>
               <a:t>In England and Wales in the 1840s, the median age of death was 46. Today it is 83.</a:t>
             </a:r>
-            <a:endParaRPr lang="en-US" sz="2000" dirty="0"/>
+            <a:endParaRPr lang="en-US" sz="2400" dirty="0"/>
           </a:p>
           <a:p>
             <a:pPr indent="0" marL="0">
               <a:spcAft>
-                <a:spcPts val="1000"/>
+                <a:spcPts val="1200"/>
               </a:spcAft>
               <a:buNone/>
             </a:pPr>
             <a:r>
-              <a:rPr lang="en-US" sz="2000" dirty="0">
+              <a:rPr lang="en-US" sz="2400" dirty="0">
                 <a:solidFill>
                   <a:srgbClr val="141B26"/>
                 </a:solidFill>
               </a:rPr>
               <a:t>1. Suggest two reasons why people live longer today.</a:t>
             </a:r>
-            <a:endParaRPr lang="en-US" sz="2000" dirty="0"/>
+            <a:endParaRPr lang="en-US" sz="2400" dirty="0"/>
           </a:p>
           <a:p>
             <a:pPr indent="0" marL="0">
               <a:spcAft>
-                <a:spcPts val="1000"/>
+                <a:spcPts val="1200"/>
               </a:spcAft>
               <a:buNone/>
             </a:pPr>
             <a:r>
-              <a:rPr lang="en-US" sz="2000" dirty="0">
+              <a:rPr lang="en-US" sz="2400" dirty="0">
                 <a:solidFill>
                   <a:srgbClr val="141B26"/>
                 </a:solidFill>
               </a:rPr>
               <a:t>2. Name one disease caused by a microorganism.</a:t>
             </a:r>
-            <a:endParaRPr lang="en-US" sz="2000" dirty="0"/>
+            <a:endParaRPr lang="en-US" sz="2400" dirty="0"/>
           </a:p>
           <a:p>
             <a:pPr indent="0" marL="0">
               <a:spcAft>
-                <a:spcPts val="1000"/>
+                <a:spcPts val="1200"/>
               </a:spcAft>
               <a:buNone/>
             </a:pPr>
             <a:r>
-              <a:rPr lang="en-US" sz="2000" dirty="0">
+              <a:rPr lang="en-US" sz="2400" dirty="0">
                 <a:solidFill>
                   <a:srgbClr val="141B26"/>
                 </a:solidFill>
               </a:rPr>
               <a:t>3. What is a microorganism?</a:t>
             </a:r>
-            <a:endParaRPr lang="en-US" sz="2000" dirty="0"/>
+            <a:endParaRPr lang="en-US" sz="2400" dirty="0"/>
           </a:p>
         </p:txBody>
       </p:sp>
@@ -4381,8 +4367,8 @@
         </p:nvSpPr>
         <p:spPr>
           <a:xfrm>
-            <a:off x="548640" y="1325880"/>
-            <a:ext cx="5669280" cy="457200"/>
+            <a:off x="548640" y="1280160"/>
+            <a:ext cx="5486400" cy="411480"/>
           </a:xfrm>
           <a:prstGeom prst="rect">
             <a:avLst/>
@@ -4398,14 +4384,14 @@
               <a:buNone/>
             </a:pPr>
             <a:r>
-              <a:rPr lang="en-US" sz="2000" b="1" dirty="0">
+              <a:rPr lang="en-US" sz="2200" b="1" dirty="0">
                 <a:solidFill>
                   <a:srgbClr val="7B3A8E"/>
                 </a:solidFill>
               </a:rPr>
               <a:t>Today I can ...</a:t>
             </a:r>
-            <a:endParaRPr lang="en-US" sz="2000" dirty="0"/>
+            <a:endParaRPr lang="en-US" sz="2200" dirty="0"/>
           </a:p>
         </p:txBody>
       </p:sp>
@@ -4417,8 +4403,8 @@
         </p:nvSpPr>
         <p:spPr>
           <a:xfrm>
-            <a:off x="594360" y="1947672"/>
-            <a:ext cx="292608" cy="292608"/>
+            <a:off x="594360" y="1810512"/>
+            <a:ext cx="310896" cy="310896"/>
           </a:xfrm>
           <a:prstGeom prst="rect">
             <a:avLst/>
@@ -4442,33 +4428,31 @@
         </p:nvSpPr>
         <p:spPr>
           <a:xfrm>
-            <a:off x="1051560" y="1874520"/>
-            <a:ext cx="5120640" cy="868680"/>
-          </a:xfrm>
-          <a:prstGeom prst="rect">
-            <a:avLst/>
-          </a:prstGeom>
-          <a:noFill/>
-          <a:ln/>
-        </p:spPr>
-        <p:txBody>
-          <a:bodyPr wrap="square" lIns="0" tIns="0" rIns="0" bIns="0" rtlCol="0" anchor="t">
-            <a:normAutofit/>
-          </a:bodyPr>
+            <a:off x="1097280" y="1737360"/>
+            <a:ext cx="10332720" cy="868680"/>
+          </a:xfrm>
+          <a:prstGeom prst="rect">
+            <a:avLst/>
+          </a:prstGeom>
+          <a:noFill/>
+          <a:ln/>
+        </p:spPr>
+        <p:txBody>
+          <a:bodyPr wrap="square" lIns="0" tIns="0" rIns="0" bIns="0" rtlCol="0" anchor="t"/>
           <a:lstStyle/>
           <a:p>
             <a:pPr indent="0" marL="0">
               <a:buNone/>
             </a:pPr>
             <a:r>
-              <a:rPr lang="en-US" sz="1600" dirty="0">
+              <a:rPr lang="en-US" sz="2000" dirty="0">
                 <a:solidFill>
                   <a:srgbClr val="141B26"/>
                 </a:solidFill>
               </a:rPr>
               <a:t>I can explain how hygiene, diet, immunisation and medicines have helped people live longer.</a:t>
             </a:r>
-            <a:endParaRPr lang="en-US" sz="1600" dirty="0"/>
+            <a:endParaRPr lang="en-US" sz="2000" dirty="0"/>
           </a:p>
         </p:txBody>
       </p:sp>
@@ -4480,8 +4464,8 @@
         </p:nvSpPr>
         <p:spPr>
           <a:xfrm>
-            <a:off x="594360" y="2907792"/>
-            <a:ext cx="292608" cy="292608"/>
+            <a:off x="594360" y="2679192"/>
+            <a:ext cx="310896" cy="310896"/>
           </a:xfrm>
           <a:prstGeom prst="rect">
             <a:avLst/>
@@ -4505,33 +4489,31 @@
         </p:nvSpPr>
         <p:spPr>
           <a:xfrm>
-            <a:off x="1051560" y="2834640"/>
-            <a:ext cx="5120640" cy="868680"/>
-          </a:xfrm>
-          <a:prstGeom prst="rect">
-            <a:avLst/>
-          </a:prstGeom>
-          <a:noFill/>
-          <a:ln/>
-        </p:spPr>
-        <p:txBody>
-          <a:bodyPr wrap="square" lIns="0" tIns="0" rIns="0" bIns="0" rtlCol="0" anchor="t">
-            <a:normAutofit/>
-          </a:bodyPr>
+            <a:off x="1097280" y="2606040"/>
+            <a:ext cx="10332720" cy="868680"/>
+          </a:xfrm>
+          <a:prstGeom prst="rect">
+            <a:avLst/>
+          </a:prstGeom>
+          <a:noFill/>
+          <a:ln/>
+        </p:spPr>
+        <p:txBody>
+          <a:bodyPr wrap="square" lIns="0" tIns="0" rIns="0" bIns="0" rtlCol="0" anchor="t"/>
           <a:lstStyle/>
           <a:p>
             <a:pPr indent="0" marL="0">
               <a:buNone/>
             </a:pPr>
             <a:r>
-              <a:rPr lang="en-US" sz="1600" dirty="0">
+              <a:rPr lang="en-US" sz="2000" dirty="0">
                 <a:solidFill>
                   <a:srgbClr val="141B26"/>
                 </a:solidFill>
               </a:rPr>
               <a:t>I can give examples of the five types of disease and say which ones can be passed from person to person.</a:t>
             </a:r>
-            <a:endParaRPr lang="en-US" sz="1600" dirty="0"/>
+            <a:endParaRPr lang="en-US" sz="2000" dirty="0"/>
           </a:p>
         </p:txBody>
       </p:sp>
@@ -4543,8 +4525,8 @@
         </p:nvSpPr>
         <p:spPr>
           <a:xfrm>
-            <a:off x="6583680" y="1325880"/>
-            <a:ext cx="5029200" cy="457200"/>
+            <a:off x="548640" y="3611880"/>
+            <a:ext cx="5486400" cy="411480"/>
           </a:xfrm>
           <a:prstGeom prst="rect">
             <a:avLst/>
@@ -4560,14 +4542,14 @@
               <a:buNone/>
             </a:pPr>
             <a:r>
-              <a:rPr lang="en-US" sz="2000" b="1" dirty="0">
+              <a:rPr lang="en-US" sz="2200" b="1" dirty="0">
                 <a:solidFill>
                   <a:srgbClr val="7B3A8E"/>
                 </a:solidFill>
               </a:rPr>
               <a:t>Key words today</a:t>
             </a:r>
-            <a:endParaRPr lang="en-US" sz="2000" dirty="0"/>
+            <a:endParaRPr lang="en-US" sz="2200" dirty="0"/>
           </a:p>
         </p:txBody>
       </p:sp>
@@ -4579,360 +4561,295 @@
         </p:nvSpPr>
         <p:spPr>
           <a:xfrm>
-            <a:off x="6583680" y="1874520"/>
-            <a:ext cx="5029200" cy="4023360"/>
-          </a:xfrm>
-          <a:prstGeom prst="rect">
-            <a:avLst/>
-          </a:prstGeom>
-          <a:noFill/>
-          <a:ln/>
-        </p:spPr>
-        <p:txBody>
-          <a:bodyPr wrap="square" lIns="0" tIns="0" rIns="0" bIns="0" rtlCol="0" anchor="t">
-            <a:normAutofit/>
-          </a:bodyPr>
+            <a:off x="548640" y="4069080"/>
+            <a:ext cx="3515258" cy="1920240"/>
+          </a:xfrm>
+          <a:prstGeom prst="rect">
+            <a:avLst/>
+          </a:prstGeom>
+          <a:noFill/>
+          <a:ln/>
+        </p:spPr>
+        <p:txBody>
+          <a:bodyPr wrap="square" lIns="0" tIns="0" rIns="0" bIns="0" rtlCol="0" anchor="t"/>
+          <a:lstStyle/>
+          <a:p>
+            <a:pPr marL="304800" indent="-304800">
+              <a:spcAft>
+                <a:spcPts val="600"/>
+              </a:spcAft>
+              <a:buSzPct val="100000"/>
+              <a:buChar char="•"/>
+            </a:pPr>
+            <a:r>
+              <a:rPr lang="en-US" sz="2100" b="1" dirty="0">
+                <a:solidFill>
+                  <a:srgbClr val="0F2A5F"/>
+                </a:solidFill>
+              </a:rPr>
+              <a:t>disease</a:t>
+            </a:r>
+            <a:endParaRPr lang="en-US" sz="2100" dirty="0"/>
+          </a:p>
+          <a:p>
+            <a:pPr marL="304800" indent="-304800">
+              <a:spcAft>
+                <a:spcPts val="600"/>
+              </a:spcAft>
+              <a:buSzPct val="100000"/>
+              <a:buChar char="•"/>
+            </a:pPr>
+            <a:r>
+              <a:rPr lang="en-US" sz="2100" b="1" dirty="0">
+                <a:solidFill>
+                  <a:srgbClr val="0F2A5F"/>
+                </a:solidFill>
+              </a:rPr>
+              <a:t>pathogen</a:t>
+            </a:r>
+            <a:endParaRPr lang="en-US" sz="2100" dirty="0"/>
+          </a:p>
+          <a:p>
+            <a:pPr marL="304800" indent="-304800">
+              <a:spcAft>
+                <a:spcPts val="600"/>
+              </a:spcAft>
+              <a:buSzPct val="100000"/>
+              <a:buChar char="•"/>
+            </a:pPr>
+            <a:r>
+              <a:rPr lang="en-US" sz="2100" b="1" dirty="0">
+                <a:solidFill>
+                  <a:srgbClr val="0F2A5F"/>
+                </a:solidFill>
+              </a:rPr>
+              <a:t>infectious disease</a:t>
+            </a:r>
+            <a:endParaRPr lang="en-US" sz="2100" dirty="0"/>
+          </a:p>
+          <a:p>
+            <a:pPr marL="304800" indent="-304800">
+              <a:spcAft>
+                <a:spcPts val="600"/>
+              </a:spcAft>
+              <a:buSzPct val="100000"/>
+              <a:buChar char="•"/>
+            </a:pPr>
+            <a:r>
+              <a:rPr lang="en-US" sz="2100" b="1" dirty="0">
+                <a:solidFill>
+                  <a:srgbClr val="0F2A5F"/>
+                </a:solidFill>
+              </a:rPr>
+              <a:t>non-communicable</a:t>
+            </a:r>
+            <a:endParaRPr lang="en-US" sz="2100" dirty="0"/>
+          </a:p>
+        </p:txBody>
+      </p:sp>
+      <p:sp>
+        <p:nvSpPr>
+          <p:cNvPr id="12" name="Text 10"/>
+          <p:cNvSpPr txBox="1"/>
+          <p:nvPr/>
+        </p:nvSpPr>
+        <p:spPr>
+          <a:xfrm>
+            <a:off x="4338218" y="4069080"/>
+            <a:ext cx="3515258" cy="1920240"/>
+          </a:xfrm>
+          <a:prstGeom prst="rect">
+            <a:avLst/>
+          </a:prstGeom>
+          <a:noFill/>
+          <a:ln/>
+        </p:spPr>
+        <p:txBody>
+          <a:bodyPr wrap="square" lIns="0" tIns="0" rIns="0" bIns="0" rtlCol="0" anchor="t"/>
+          <a:lstStyle/>
+          <a:p>
+            <a:pPr marL="304800" indent="-304800">
+              <a:spcAft>
+                <a:spcPts val="600"/>
+              </a:spcAft>
+              <a:buSzPct val="100000"/>
+              <a:buChar char="•"/>
+            </a:pPr>
+            <a:r>
+              <a:rPr lang="en-US" sz="2100" b="1" dirty="0">
+                <a:solidFill>
+                  <a:srgbClr val="0F2A5F"/>
+                </a:solidFill>
+              </a:rPr>
+              <a:t>deficiency disease</a:t>
+            </a:r>
+            <a:endParaRPr lang="en-US" sz="2100" dirty="0"/>
+          </a:p>
+          <a:p>
+            <a:pPr marL="304800" indent="-304800">
+              <a:spcAft>
+                <a:spcPts val="600"/>
+              </a:spcAft>
+              <a:buSzPct val="100000"/>
+              <a:buChar char="•"/>
+            </a:pPr>
+            <a:r>
+              <a:rPr lang="en-US" sz="2100" b="1" dirty="0">
+                <a:solidFill>
+                  <a:srgbClr val="0F2A5F"/>
+                </a:solidFill>
+              </a:rPr>
+              <a:t>genetic disease</a:t>
+            </a:r>
+            <a:endParaRPr lang="en-US" sz="2100" dirty="0"/>
+          </a:p>
+          <a:p>
+            <a:pPr marL="304800" indent="-304800">
+              <a:spcAft>
+                <a:spcPts val="600"/>
+              </a:spcAft>
+              <a:buSzPct val="100000"/>
+              <a:buChar char="•"/>
+            </a:pPr>
+            <a:r>
+              <a:rPr lang="en-US" sz="2100" b="1" dirty="0">
+                <a:solidFill>
+                  <a:srgbClr val="0F2A5F"/>
+                </a:solidFill>
+              </a:rPr>
+              <a:t>lifestyle disease</a:t>
+            </a:r>
+            <a:endParaRPr lang="en-US" sz="2100" dirty="0"/>
+          </a:p>
+          <a:p>
+            <a:pPr marL="304800" indent="-304800">
+              <a:spcAft>
+                <a:spcPts val="600"/>
+              </a:spcAft>
+              <a:buSzPct val="100000"/>
+              <a:buChar char="•"/>
+            </a:pPr>
+            <a:r>
+              <a:rPr lang="en-US" sz="2100" b="1" dirty="0">
+                <a:solidFill>
+                  <a:srgbClr val="0F2A5F"/>
+                </a:solidFill>
+              </a:rPr>
+              <a:t>autoimmune disease</a:t>
+            </a:r>
+            <a:endParaRPr lang="en-US" sz="2100" dirty="0"/>
+          </a:p>
+        </p:txBody>
+      </p:sp>
+      <p:sp>
+        <p:nvSpPr>
+          <p:cNvPr id="13" name="Text 11"/>
+          <p:cNvSpPr txBox="1"/>
+          <p:nvPr/>
+        </p:nvSpPr>
+        <p:spPr>
+          <a:xfrm>
+            <a:off x="8127797" y="4069080"/>
+            <a:ext cx="3515258" cy="1920240"/>
+          </a:xfrm>
+          <a:prstGeom prst="rect">
+            <a:avLst/>
+          </a:prstGeom>
+          <a:noFill/>
+          <a:ln/>
+        </p:spPr>
+        <p:txBody>
+          <a:bodyPr wrap="square" lIns="0" tIns="0" rIns="0" bIns="0" rtlCol="0" anchor="t"/>
+          <a:lstStyle/>
+          <a:p>
+            <a:pPr marL="304800" indent="-304800">
+              <a:spcAft>
+                <a:spcPts val="600"/>
+              </a:spcAft>
+              <a:buSzPct val="100000"/>
+              <a:buChar char="•"/>
+            </a:pPr>
+            <a:r>
+              <a:rPr lang="en-US" sz="2200" b="1" dirty="0">
+                <a:solidFill>
+                  <a:srgbClr val="0F2A5F"/>
+                </a:solidFill>
+              </a:rPr>
+              <a:t>symptom</a:t>
+            </a:r>
+            <a:endParaRPr lang="en-US" sz="2200" dirty="0"/>
+          </a:p>
+          <a:p>
+            <a:pPr marL="304800" indent="-304800">
+              <a:spcAft>
+                <a:spcPts val="600"/>
+              </a:spcAft>
+              <a:buSzPct val="100000"/>
+              <a:buChar char="•"/>
+            </a:pPr>
+            <a:r>
+              <a:rPr lang="en-US" sz="2200" b="1" dirty="0">
+                <a:solidFill>
+                  <a:srgbClr val="0F2A5F"/>
+                </a:solidFill>
+              </a:rPr>
+              <a:t>hygiene</a:t>
+            </a:r>
+            <a:endParaRPr lang="en-US" sz="2200" dirty="0"/>
+          </a:p>
+          <a:p>
+            <a:pPr marL="304800" indent="-304800">
+              <a:spcAft>
+                <a:spcPts val="600"/>
+              </a:spcAft>
+              <a:buSzPct val="100000"/>
+              <a:buChar char="•"/>
+            </a:pPr>
+            <a:r>
+              <a:rPr lang="en-US" sz="2200" b="1" dirty="0">
+                <a:solidFill>
+                  <a:srgbClr val="0F2A5F"/>
+                </a:solidFill>
+              </a:rPr>
+              <a:t>immunisation</a:t>
+            </a:r>
+            <a:endParaRPr lang="en-US" sz="2200" dirty="0"/>
+          </a:p>
+        </p:txBody>
+      </p:sp>
+      <p:sp>
+        <p:nvSpPr>
+          <p:cNvPr id="14" name="Text 12"/>
+          <p:cNvSpPr txBox="1"/>
+          <p:nvPr/>
+        </p:nvSpPr>
+        <p:spPr>
+          <a:xfrm>
+            <a:off x="548640" y="6035040"/>
+            <a:ext cx="10881360" cy="320040"/>
+          </a:xfrm>
+          <a:prstGeom prst="rect">
+            <a:avLst/>
+          </a:prstGeom>
+          <a:noFill/>
+          <a:ln/>
+        </p:spPr>
+        <p:txBody>
+          <a:bodyPr wrap="square" lIns="0" tIns="0" rIns="0" bIns="0" rtlCol="0" anchor="ctr"/>
           <a:lstStyle/>
           <a:p>
             <a:pPr indent="0" marL="0">
-              <a:spcAft>
-                <a:spcPts val="500"/>
-              </a:spcAft>
-              <a:buNone/>
-            </a:pPr>
-            <a:r>
-              <a:rPr lang="en-US" sz="1300" b="1" dirty="0">
-                <a:solidFill>
-                  <a:srgbClr val="0F2A5F"/>
-                </a:solidFill>
-              </a:rPr>
-              <a:t>disease</a:t>
-            </a:r>
-            <a:pPr indent="0" marL="0">
-              <a:spcAft>
-                <a:spcPts val="500"/>
-              </a:spcAft>
-              <a:buNone/>
-            </a:pPr>
-            <a:r>
-              <a:rPr lang="en-US" sz="1300" dirty="0">
-                <a:solidFill>
-                  <a:srgbClr val="141B26"/>
-                </a:solidFill>
-              </a:rPr>
-              <a:t>  something that makes you ill</a:t>
-            </a:r>
-            <a:endParaRPr lang="en-US" sz="1300" dirty="0"/>
-          </a:p>
-          <a:p>
-            <a:pPr indent="0" marL="0">
-              <a:spcAft>
-                <a:spcPts val="500"/>
-              </a:spcAft>
-              <a:buNone/>
-            </a:pPr>
-            <a:r>
-              <a:rPr lang="en-US" sz="1300" b="1" dirty="0">
-                <a:solidFill>
-                  <a:srgbClr val="0F2A5F"/>
-                </a:solidFill>
-              </a:rPr>
-              <a:t>pathogen</a:t>
-            </a:r>
-            <a:pPr indent="0" marL="0">
-              <a:spcAft>
-                <a:spcPts val="500"/>
-              </a:spcAft>
-              <a:buNone/>
-            </a:pPr>
-            <a:r>
-              <a:rPr lang="en-US" sz="1300" dirty="0">
-                <a:solidFill>
-                  <a:srgbClr val="141B26"/>
-                </a:solidFill>
-              </a:rPr>
-              <a:t>  a microorganism that causes disease</a:t>
-            </a:r>
-            <a:endParaRPr lang="en-US" sz="1300" dirty="0"/>
-          </a:p>
-          <a:p>
-            <a:pPr indent="0" marL="0">
-              <a:spcAft>
-                <a:spcPts val="500"/>
-              </a:spcAft>
-              <a:buNone/>
-            </a:pPr>
-            <a:r>
-              <a:rPr lang="en-US" sz="1300" b="1" dirty="0">
-                <a:solidFill>
-                  <a:srgbClr val="0F2A5F"/>
-                </a:solidFill>
-              </a:rPr>
-              <a:t>infectious disease</a:t>
-            </a:r>
-            <a:pPr indent="0" marL="0">
-              <a:spcAft>
-                <a:spcPts val="500"/>
-              </a:spcAft>
-              <a:buNone/>
-            </a:pPr>
-            <a:r>
-              <a:rPr lang="en-US" sz="1300" dirty="0">
-                <a:solidFill>
-                  <a:srgbClr val="141B26"/>
-                </a:solidFill>
-              </a:rPr>
-              <a:t>  a disease caused by a pathogen that can pass from person to person (communicable)</a:t>
-            </a:r>
-            <a:endParaRPr lang="en-US" sz="1300" dirty="0"/>
-          </a:p>
-          <a:p>
-            <a:pPr indent="0" marL="0">
-              <a:spcAft>
-                <a:spcPts val="500"/>
-              </a:spcAft>
-              <a:buNone/>
-            </a:pPr>
-            <a:r>
-              <a:rPr lang="en-US" sz="1300" b="1" dirty="0">
-                <a:solidFill>
-                  <a:srgbClr val="0F2A5F"/>
-                </a:solidFill>
-              </a:rPr>
-              <a:t>non-communicable</a:t>
-            </a:r>
-            <a:pPr indent="0" marL="0">
-              <a:spcAft>
-                <a:spcPts val="500"/>
-              </a:spcAft>
-              <a:buNone/>
-            </a:pPr>
-            <a:r>
-              <a:rPr lang="en-US" sz="1300" dirty="0">
-                <a:solidFill>
-                  <a:srgbClr val="141B26"/>
-                </a:solidFill>
-              </a:rPr>
-              <a:t>  cannot be passed from person to person</a:t>
-            </a:r>
-            <a:endParaRPr lang="en-US" sz="1300" dirty="0"/>
-          </a:p>
-          <a:p>
-            <a:pPr indent="0" marL="0">
-              <a:spcAft>
-                <a:spcPts val="500"/>
-              </a:spcAft>
-              <a:buNone/>
-            </a:pPr>
-            <a:r>
-              <a:rPr lang="en-US" sz="1300" b="1" dirty="0">
-                <a:solidFill>
-                  <a:srgbClr val="0F2A5F"/>
-                </a:solidFill>
-              </a:rPr>
-              <a:t>deficiency disease</a:t>
-            </a:r>
-            <a:pPr indent="0" marL="0">
-              <a:spcAft>
-                <a:spcPts val="500"/>
-              </a:spcAft>
-              <a:buNone/>
-            </a:pPr>
-            <a:r>
-              <a:rPr lang="en-US" sz="1300" dirty="0">
-                <a:solidFill>
-                  <a:srgbClr val="141B26"/>
-                </a:solidFill>
-              </a:rPr>
-              <a:t>  a disease caused by a lack of a nutrient in the diet</a:t>
-            </a:r>
-            <a:endParaRPr lang="en-US" sz="1300" dirty="0"/>
-          </a:p>
-          <a:p>
-            <a:pPr indent="0" marL="0">
-              <a:spcAft>
-                <a:spcPts val="500"/>
-              </a:spcAft>
-              <a:buNone/>
-            </a:pPr>
-            <a:r>
-              <a:rPr lang="en-US" sz="1300" b="1" dirty="0">
-                <a:solidFill>
-                  <a:srgbClr val="0F2A5F"/>
-                </a:solidFill>
-              </a:rPr>
-              <a:t>genetic disease</a:t>
-            </a:r>
-            <a:pPr indent="0" marL="0">
-              <a:spcAft>
-                <a:spcPts val="500"/>
-              </a:spcAft>
-              <a:buNone/>
-            </a:pPr>
-            <a:r>
-              <a:rPr lang="en-US" sz="1300" dirty="0">
-                <a:solidFill>
-                  <a:srgbClr val="141B26"/>
-                </a:solidFill>
-              </a:rPr>
-              <a:t>  a disease caused by a fault in the DNA</a:t>
-            </a:r>
-            <a:endParaRPr lang="en-US" sz="1300" dirty="0"/>
-          </a:p>
-          <a:p>
-            <a:pPr indent="0" marL="0">
-              <a:spcAft>
-                <a:spcPts val="500"/>
-              </a:spcAft>
-              <a:buNone/>
-            </a:pPr>
-            <a:r>
-              <a:rPr lang="en-US" sz="1300" b="1" dirty="0">
-                <a:solidFill>
-                  <a:srgbClr val="0F2A5F"/>
-                </a:solidFill>
-              </a:rPr>
-              <a:t>lifestyle disease</a:t>
-            </a:r>
-            <a:pPr indent="0" marL="0">
-              <a:spcAft>
-                <a:spcPts val="500"/>
-              </a:spcAft>
-              <a:buNone/>
-            </a:pPr>
-            <a:r>
-              <a:rPr lang="en-US" sz="1300" dirty="0">
-                <a:solidFill>
-                  <a:srgbClr val="141B26"/>
-                </a:solidFill>
-              </a:rPr>
-              <a:t>  a disease made more likely by the way we live, e.g. smoking</a:t>
-            </a:r>
-            <a:endParaRPr lang="en-US" sz="1300" dirty="0"/>
-          </a:p>
-          <a:p>
-            <a:pPr indent="0" marL="0">
-              <a:spcAft>
-                <a:spcPts val="500"/>
-              </a:spcAft>
-              <a:buNone/>
-            </a:pPr>
-            <a:r>
-              <a:rPr lang="en-US" sz="1300" b="1" dirty="0">
-                <a:solidFill>
-                  <a:srgbClr val="0F2A5F"/>
-                </a:solidFill>
-              </a:rPr>
-              <a:t>autoimmune disease</a:t>
-            </a:r>
-            <a:pPr indent="0" marL="0">
-              <a:spcAft>
-                <a:spcPts val="500"/>
-              </a:spcAft>
-              <a:buNone/>
-            </a:pPr>
-            <a:r>
-              <a:rPr lang="en-US" sz="1300" dirty="0">
-                <a:solidFill>
-                  <a:srgbClr val="141B26"/>
-                </a:solidFill>
-              </a:rPr>
-              <a:t>  a disease in which the body's own white blood cells attack it</a:t>
-            </a:r>
-            <a:endParaRPr lang="en-US" sz="1300" dirty="0"/>
-          </a:p>
-          <a:p>
-            <a:pPr indent="0" marL="0">
-              <a:spcAft>
-                <a:spcPts val="500"/>
-              </a:spcAft>
-              <a:buNone/>
-            </a:pPr>
-            <a:r>
-              <a:rPr lang="en-US" sz="1300" b="1" dirty="0">
-                <a:solidFill>
-                  <a:srgbClr val="0F2A5F"/>
-                </a:solidFill>
-              </a:rPr>
-              <a:t>symptom</a:t>
-            </a:r>
-            <a:pPr indent="0" marL="0">
-              <a:spcAft>
-                <a:spcPts val="500"/>
-              </a:spcAft>
-              <a:buNone/>
-            </a:pPr>
-            <a:r>
-              <a:rPr lang="en-US" sz="1300" dirty="0">
-                <a:solidFill>
-                  <a:srgbClr val="141B26"/>
-                </a:solidFill>
-              </a:rPr>
-              <a:t>  an obvious effect of a disease, e.g. a rash</a:t>
-            </a:r>
-            <a:endParaRPr lang="en-US" sz="1300" dirty="0"/>
-          </a:p>
-          <a:p>
-            <a:pPr indent="0" marL="0">
-              <a:spcAft>
-                <a:spcPts val="500"/>
-              </a:spcAft>
-              <a:buNone/>
-            </a:pPr>
-            <a:r>
-              <a:rPr lang="en-US" sz="1300" b="1" dirty="0">
-                <a:solidFill>
-                  <a:srgbClr val="0F2A5F"/>
-                </a:solidFill>
-              </a:rPr>
-              <a:t>hygiene</a:t>
-            </a:r>
-            <a:pPr indent="0" marL="0">
-              <a:spcAft>
-                <a:spcPts val="500"/>
-              </a:spcAft>
-              <a:buNone/>
-            </a:pPr>
-            <a:r>
-              <a:rPr lang="en-US" sz="1300" dirty="0">
-                <a:solidFill>
-                  <a:srgbClr val="141B26"/>
-                </a:solidFill>
-              </a:rPr>
-              <a:t>  keeping things clean so pathogens do not spread</a:t>
-            </a:r>
-            <a:endParaRPr lang="en-US" sz="1300" dirty="0"/>
-          </a:p>
-          <a:p>
-            <a:pPr indent="0" marL="0">
-              <a:spcAft>
-                <a:spcPts val="500"/>
-              </a:spcAft>
-              <a:buNone/>
-            </a:pPr>
-            <a:r>
-              <a:rPr lang="en-US" sz="1300" b="1" dirty="0">
-                <a:solidFill>
-                  <a:srgbClr val="0F2A5F"/>
-                </a:solidFill>
-              </a:rPr>
-              <a:t>immunisation</a:t>
-            </a:r>
-            <a:pPr indent="0" marL="0">
-              <a:spcAft>
-                <a:spcPts val="500"/>
-              </a:spcAft>
-              <a:buNone/>
-            </a:pPr>
-            <a:r>
-              <a:rPr lang="en-US" sz="1300" dirty="0">
-                <a:solidFill>
-                  <a:srgbClr val="141B26"/>
-                </a:solidFill>
-              </a:rPr>
-              <a:t>  giving a vaccine to protect against a disease</a:t>
-            </a:r>
-            <a:endParaRPr lang="en-US" sz="1300" dirty="0"/>
+              <a:buNone/>
+            </a:pPr>
+            <a:r>
+              <a:rPr lang="en-US" sz="1400" i="1" dirty="0">
+                <a:solidFill>
+                  <a:srgbClr val="5B6574"/>
+                </a:solidFill>
+              </a:rPr>
+              <a:t>Meanings are in the key words box on your worksheet.</a:t>
+            </a:r>
+            <a:endParaRPr lang="en-US" sz="1400" dirty="0"/>
           </a:p>
         </p:txBody>
       </p:sp>
@@ -5116,32 +5033,30 @@
         <p:spPr>
           <a:xfrm>
             <a:off x="548640" y="1371600"/>
-            <a:ext cx="5394960" cy="2377440"/>
-          </a:xfrm>
-          <a:prstGeom prst="rect">
-            <a:avLst/>
-          </a:prstGeom>
-          <a:noFill/>
-          <a:ln/>
-        </p:spPr>
-        <p:txBody>
-          <a:bodyPr wrap="square" lIns="0" tIns="0" rIns="0" bIns="0" rtlCol="0" anchor="t">
-            <a:normAutofit/>
-          </a:bodyPr>
+            <a:ext cx="5394960" cy="2651760"/>
+          </a:xfrm>
+          <a:prstGeom prst="rect">
+            <a:avLst/>
+          </a:prstGeom>
+          <a:noFill/>
+          <a:ln/>
+        </p:spPr>
+        <p:txBody>
+          <a:bodyPr wrap="square" lIns="0" tIns="0" rIns="0" bIns="0" rtlCol="0" anchor="t"/>
           <a:lstStyle/>
           <a:p>
             <a:pPr indent="0" marL="0">
               <a:buNone/>
             </a:pPr>
             <a:r>
-              <a:rPr lang="en-US" sz="2800" b="1" dirty="0">
+              <a:rPr lang="en-US" sz="2700" b="1" dirty="0">
                 <a:solidFill>
                   <a:srgbClr val="0F2A5F"/>
                 </a:solidFill>
               </a:rPr>
               <a:t>In one London street, hundreds of people died of cholera in a few days. Dr John Snow mapped every death. Almost all the victims drank from one water pump. What did he suspect?</a:t>
             </a:r>
-            <a:endParaRPr lang="en-US" sz="2800" dirty="0"/>
+            <a:endParaRPr lang="en-US" sz="2700" dirty="0"/>
           </a:p>
         </p:txBody>
       </p:sp>
@@ -5153,19 +5068,17 @@
         </p:nvSpPr>
         <p:spPr>
           <a:xfrm>
-            <a:off x="548640" y="3794760"/>
-            <a:ext cx="5394960" cy="2103120"/>
-          </a:xfrm>
-          <a:prstGeom prst="rect">
-            <a:avLst/>
-          </a:prstGeom>
-          <a:noFill/>
-          <a:ln/>
-        </p:spPr>
-        <p:txBody>
-          <a:bodyPr wrap="square" lIns="0" tIns="0" rIns="0" bIns="0" rtlCol="0" anchor="t">
-            <a:normAutofit/>
-          </a:bodyPr>
+            <a:off x="548640" y="4114800"/>
+            <a:ext cx="5394960" cy="1828800"/>
+          </a:xfrm>
+          <a:prstGeom prst="rect">
+            <a:avLst/>
+          </a:prstGeom>
+          <a:noFill/>
+          <a:ln/>
+        </p:spPr>
+        <p:txBody>
+          <a:bodyPr wrap="square" lIns="0" tIns="0" rIns="0" bIns="0" rtlCol="0" anchor="t"/>
           <a:lstStyle/>
           <a:p>
             <a:pPr indent="0" marL="0">
@@ -5175,14 +5088,14 @@
               <a:buNone/>
             </a:pPr>
             <a:r>
-              <a:rPr lang="en-US" sz="1600" dirty="0">
+              <a:rPr lang="en-US" sz="2000" dirty="0">
                 <a:solidFill>
                   <a:srgbClr val="141B26"/>
                 </a:solidFill>
               </a:rPr>
               <a:t>Talk to a partner: how could water make people ill?</a:t>
             </a:r>
-            <a:endParaRPr lang="en-US" sz="1600" dirty="0"/>
+            <a:endParaRPr lang="en-US" sz="2000" dirty="0"/>
           </a:p>
         </p:txBody>
       </p:sp>
@@ -5219,7 +5132,7 @@
         <p:spPr>
           <a:xfrm>
             <a:off x="6309360" y="5417820"/>
-            <a:ext cx="5303520" cy="502920"/>
+            <a:ext cx="5303520" cy="548640"/>
           </a:xfrm>
           <a:prstGeom prst="rect">
             <a:avLst/>
@@ -5235,7 +5148,7 @@
               <a:buNone/>
             </a:pPr>
             <a:r>
-              <a:rPr lang="en-US" sz="1100" dirty="0">
+              <a:rPr lang="en-US" sz="1300" dirty="0">
                 <a:solidFill>
                   <a:srgbClr val="141B26"/>
                 </a:solidFill>
@@ -5245,21 +5158,21 @@
             <a:pPr algn="l" indent="0" marL="0">
               <a:buNone/>
             </a:pPr>
-            <a:endParaRPr lang="en-US" sz="1100" dirty="0"/>
+            <a:endParaRPr lang="en-US" sz="1300" dirty="0"/>
           </a:p>
           <a:p>
             <a:pPr algn="l" indent="0" marL="0">
               <a:buNone/>
             </a:pPr>
             <a:r>
-              <a:rPr lang="en-US" sz="800" dirty="0">
+              <a:rPr lang="en-US" sz="900" dirty="0">
                 <a:solidFill>
                   <a:srgbClr val="5B6574"/>
                 </a:solidFill>
               </a:rPr>
               <a:t>Image: Ewan-M, CC BY-SA 2.0, via Wikimedia Commons</a:t>
             </a:r>
-            <a:endParaRPr lang="en-US" sz="1100" dirty="0"/>
+            <a:endParaRPr lang="en-US" sz="1300" dirty="0"/>
           </a:p>
         </p:txBody>
       </p:sp>
@@ -5442,8 +5355,8 @@
         </p:nvSpPr>
         <p:spPr>
           <a:xfrm>
-            <a:off x="548640" y="6053328"/>
-            <a:ext cx="9601200" cy="292608"/>
+            <a:off x="548640" y="6035040"/>
+            <a:ext cx="9601200" cy="310896"/>
           </a:xfrm>
           <a:prstGeom prst="rect">
             <a:avLst/>
@@ -5459,7 +5372,7 @@
               <a:buNone/>
             </a:pPr>
             <a:r>
-              <a:rPr lang="en-US" sz="1200" b="1" dirty="0">
+              <a:rPr lang="en-US" sz="1400" b="1" dirty="0">
                 <a:solidFill>
                   <a:srgbClr val="7B3A8E"/>
                 </a:solidFill>
@@ -5470,14 +5383,14 @@
               <a:buNone/>
             </a:pPr>
             <a:r>
-              <a:rPr lang="en-US" sz="1200" dirty="0">
+              <a:rPr lang="en-US" sz="1400" dirty="0">
                 <a:solidFill>
                   <a:srgbClr val="7B3A8E"/>
                 </a:solidFill>
               </a:rPr>
               <a:t>hygiene   ·   pathogen   ·   immunisation</a:t>
             </a:r>
-            <a:endParaRPr lang="en-US" sz="1200" dirty="0"/>
+            <a:endParaRPr lang="en-US" sz="1400" dirty="0"/>
           </a:p>
         </p:txBody>
       </p:sp>
@@ -5499,81 +5412,79 @@
           <a:ln/>
         </p:spPr>
         <p:txBody>
-          <a:bodyPr wrap="square" lIns="0" tIns="0" rIns="0" bIns="0" rtlCol="0" anchor="t">
-            <a:normAutofit/>
-          </a:bodyPr>
-          <a:lstStyle/>
-          <a:p>
-            <a:pPr marL="228600" indent="-228600">
+          <a:bodyPr wrap="square" lIns="0" tIns="0" rIns="0" bIns="0" rtlCol="0" anchor="t"/>
+          <a:lstStyle/>
+          <a:p>
+            <a:pPr marL="304800" indent="-304800">
               <a:spcAft>
-                <a:spcPts val="600"/>
+                <a:spcPts val="800"/>
               </a:spcAft>
               <a:buSzPct val="100000"/>
               <a:buChar char="•"/>
             </a:pPr>
             <a:r>
-              <a:rPr lang="en-US" sz="1700" dirty="0">
+              <a:rPr lang="en-US" sz="2000" dirty="0">
                 <a:solidFill>
                   <a:srgbClr val="141B26"/>
                 </a:solidFill>
               </a:rPr>
               <a:t>Hygiene keeps drinking water separate from sewage, which contains pathogens (cholera, typhoid).</a:t>
             </a:r>
-            <a:endParaRPr lang="en-US" sz="1700" dirty="0"/>
-          </a:p>
-          <a:p>
-            <a:pPr marL="228600" indent="-228600">
+            <a:endParaRPr lang="en-US" sz="2000" dirty="0"/>
+          </a:p>
+          <a:p>
+            <a:pPr marL="304800" indent="-304800">
               <a:spcAft>
-                <a:spcPts val="600"/>
+                <a:spcPts val="800"/>
               </a:spcAft>
               <a:buSzPct val="100000"/>
               <a:buChar char="•"/>
             </a:pPr>
             <a:r>
-              <a:rPr lang="en-US" sz="1700" dirty="0">
+              <a:rPr lang="en-US" sz="2000" dirty="0">
                 <a:solidFill>
                   <a:srgbClr val="141B26"/>
                 </a:solidFill>
               </a:rPr>
               <a:t>Better diet: healthier bodies fight disease better.</a:t>
             </a:r>
-            <a:endParaRPr lang="en-US" sz="1700" dirty="0"/>
-          </a:p>
-          <a:p>
-            <a:pPr marL="228600" indent="-228600">
+            <a:endParaRPr lang="en-US" sz="2000" dirty="0"/>
+          </a:p>
+          <a:p>
+            <a:pPr marL="304800" indent="-304800">
               <a:spcAft>
-                <a:spcPts val="600"/>
+                <a:spcPts val="800"/>
               </a:spcAft>
               <a:buSzPct val="100000"/>
               <a:buChar char="•"/>
             </a:pPr>
             <a:r>
-              <a:rPr lang="en-US" sz="1700" dirty="0">
+              <a:rPr lang="en-US" sz="2000" dirty="0">
                 <a:solidFill>
                   <a:srgbClr val="141B26"/>
                 </a:solidFill>
               </a:rPr>
               <a:t>Immunisation protects against particular diseases. Polio paralysed or killed about half a million people a year in the 1940s; today there are a few hundred cases.</a:t>
             </a:r>
-            <a:endParaRPr lang="en-US" sz="1700" dirty="0"/>
-          </a:p>
-          <a:p>
-            <a:pPr marL="228600" indent="-228600">
+            <a:endParaRPr lang="en-US" sz="2000" dirty="0"/>
+          </a:p>
+          <a:p>
+            <a:pPr marL="304800" indent="-304800">
               <a:spcAft>
-                <a:spcPts val="600"/>
+                <a:spcPts val="800"/>
               </a:spcAft>
               <a:buSzPct val="100000"/>
               <a:buChar char="•"/>
             </a:pPr>
             <a:r>
-              <a:rPr lang="en-US" sz="1700" dirty="0">
+              <a:rPr lang="en-US" sz="2000" dirty="0">
                 <a:solidFill>
                   <a:srgbClr val="141B26"/>
                 </a:solidFill>
               </a:rPr>
               <a:t>Medicines, including antibiotics for bacterial diseases.</a:t>
             </a:r>
-            <a:endParaRPr lang="en-US" sz="1700" dirty="0"/>
+            <a:endParaRPr lang="en-US" sz="2000" dirty="0"/>
           </a:p>
         </p:txBody>
       </p:sp>
@@ -5610,7 +5521,7 @@
         <p:spPr>
           <a:xfrm>
             <a:off x="6583680" y="4831899"/>
-            <a:ext cx="5029200" cy="502920"/>
+            <a:ext cx="5029200" cy="548640"/>
           </a:xfrm>
           <a:prstGeom prst="rect">
             <a:avLst/>
@@ -5626,7 +5537,7 @@
               <a:buNone/>
             </a:pPr>
             <a:r>
-              <a:rPr lang="en-US" sz="1100" dirty="0">
+              <a:rPr lang="en-US" sz="1300" dirty="0">
                 <a:solidFill>
                   <a:srgbClr val="141B26"/>
                 </a:solidFill>
@@ -5636,21 +5547,21 @@
             <a:pPr algn="l" indent="0" marL="0">
               <a:buNone/>
             </a:pPr>
-            <a:endParaRPr lang="en-US" sz="1100" dirty="0"/>
+            <a:endParaRPr lang="en-US" sz="1300" dirty="0"/>
           </a:p>
           <a:p>
             <a:pPr algn="l" indent="0" marL="0">
               <a:buNone/>
             </a:pPr>
             <a:r>
-              <a:rPr lang="en-US" sz="800" dirty="0">
+              <a:rPr lang="en-US" sz="900" dirty="0">
                 <a:solidFill>
                   <a:srgbClr val="5B6574"/>
                 </a:solidFill>
               </a:rPr>
               <a:t>Image: hdptcar, CC BY 2.0, via Wikimedia Commons</a:t>
             </a:r>
-            <a:endParaRPr lang="en-US" sz="1100" dirty="0"/>
+            <a:endParaRPr lang="en-US" sz="1300" dirty="0"/>
           </a:p>
         </p:txBody>
       </p:sp>
@@ -5697,16 +5608,14 @@
           <a:ln/>
         </p:spPr>
         <p:txBody>
-          <a:bodyPr wrap="square" lIns="0" tIns="0" rIns="0" bIns="0" rtlCol="0" anchor="ctr">
-            <a:normAutofit/>
-          </a:bodyPr>
+          <a:bodyPr wrap="square" lIns="0" tIns="0" rIns="0" bIns="0" rtlCol="0" anchor="ctr"/>
           <a:lstStyle/>
           <a:p>
             <a:pPr indent="0" marL="0">
               <a:buNone/>
             </a:pPr>
             <a:r>
-              <a:rPr lang="en-US" sz="1400" b="1" dirty="0">
+              <a:rPr lang="en-US" sz="1700" b="1" dirty="0">
                 <a:solidFill>
                   <a:srgbClr val="7B3A8E"/>
                 </a:solidFill>
@@ -5717,14 +5626,14 @@
               <a:buNone/>
             </a:pPr>
             <a:r>
-              <a:rPr lang="en-US" sz="1400" dirty="0">
+              <a:rPr lang="en-US" sz="1700" dirty="0">
                 <a:solidFill>
                   <a:srgbClr val="141B26"/>
                 </a:solidFill>
               </a:rPr>
               <a:t>Hygiene, diet, immunisation and medicines have cut deaths from infectious diseases.</a:t>
             </a:r>
-            <a:endParaRPr lang="en-US" sz="1400" dirty="0"/>
+            <a:endParaRPr lang="en-US" sz="1700" dirty="0"/>
           </a:p>
         </p:txBody>
       </p:sp>
@@ -5924,14 +5833,14 @@
               <a:buNone/>
             </a:pPr>
             <a:r>
-              <a:rPr lang="en-US" sz="1600" dirty="0">
+              <a:rPr lang="en-US" sz="1800" dirty="0">
                 <a:solidFill>
                   <a:srgbClr val="141B26"/>
                 </a:solidFill>
               </a:rPr>
               <a:t>A disease is something that makes you ill. Diseases have many different causes.</a:t>
             </a:r>
-            <a:endParaRPr lang="en-US" sz="1600" dirty="0"/>
+            <a:endParaRPr lang="en-US" sz="1800" dirty="0"/>
           </a:p>
         </p:txBody>
       </p:sp>
@@ -6002,16 +5911,14 @@
           <a:ln/>
         </p:spPr>
         <p:txBody>
-          <a:bodyPr wrap="square" lIns="0" tIns="0" rIns="0" bIns="0" rtlCol="0" anchor="ctr">
-            <a:normAutofit/>
-          </a:bodyPr>
+          <a:bodyPr wrap="square" lIns="0" tIns="0" rIns="0" bIns="0" rtlCol="0" anchor="ctr"/>
           <a:lstStyle/>
           <a:p>
             <a:pPr indent="0" marL="0">
               <a:buNone/>
             </a:pPr>
             <a:r>
-              <a:rPr lang="en-US" sz="1400" b="1" dirty="0">
+              <a:rPr lang="en-US" sz="1700" b="1" dirty="0">
                 <a:solidFill>
                   <a:srgbClr val="7B3A8E"/>
                 </a:solidFill>
@@ -6022,14 +5929,14 @@
               <a:buNone/>
             </a:pPr>
             <a:r>
-              <a:rPr lang="en-US" sz="1400" dirty="0">
+              <a:rPr lang="en-US" sz="1700" dirty="0">
                 <a:solidFill>
                   <a:srgbClr val="141B26"/>
                 </a:solidFill>
               </a:rPr>
               <a:t>Only infectious diseases can be passed from person to person. The other four types are non-communicable.</a:t>
             </a:r>
-            <a:endParaRPr lang="en-US" sz="1400" dirty="0"/>
+            <a:endParaRPr lang="en-US" sz="1700" dirty="0"/>
           </a:p>
         </p:txBody>
       </p:sp>
@@ -6212,8 +6119,8 @@
         </p:nvSpPr>
         <p:spPr>
           <a:xfrm>
-            <a:off x="548640" y="6053328"/>
-            <a:ext cx="9601200" cy="292608"/>
+            <a:off x="548640" y="6035040"/>
+            <a:ext cx="9601200" cy="310896"/>
           </a:xfrm>
           <a:prstGeom prst="rect">
             <a:avLst/>
@@ -6229,7 +6136,7 @@
               <a:buNone/>
             </a:pPr>
             <a:r>
-              <a:rPr lang="en-US" sz="1200" b="1" dirty="0">
+              <a:rPr lang="en-US" sz="1400" b="1" dirty="0">
                 <a:solidFill>
                   <a:srgbClr val="7B3A8E"/>
                 </a:solidFill>
@@ -6240,14 +6147,14 @@
               <a:buNone/>
             </a:pPr>
             <a:r>
-              <a:rPr lang="en-US" sz="1200" dirty="0">
+              <a:rPr lang="en-US" sz="1400" dirty="0">
                 <a:solidFill>
                   <a:srgbClr val="7B3A8E"/>
                 </a:solidFill>
               </a:rPr>
               <a:t>pathogen   ·   symptom   ·   infectious disease</a:t>
             </a:r>
-            <a:endParaRPr lang="en-US" sz="1200" dirty="0"/>
+            <a:endParaRPr lang="en-US" sz="1400" dirty="0"/>
           </a:p>
         </p:txBody>
       </p:sp>
@@ -6269,81 +6176,79 @@
           <a:ln/>
         </p:spPr>
         <p:txBody>
-          <a:bodyPr wrap="square" lIns="0" tIns="0" rIns="0" bIns="0" rtlCol="0" anchor="t">
-            <a:normAutofit/>
-          </a:bodyPr>
-          <a:lstStyle/>
-          <a:p>
-            <a:pPr marL="228600" indent="-228600">
+          <a:bodyPr wrap="square" lIns="0" tIns="0" rIns="0" bIns="0" rtlCol="0" anchor="t"/>
+          <a:lstStyle/>
+          <a:p>
+            <a:pPr marL="304800" indent="-304800">
               <a:spcAft>
-                <a:spcPts val="600"/>
+                <a:spcPts val="800"/>
               </a:spcAft>
               <a:buSzPct val="100000"/>
               <a:buChar char="•"/>
             </a:pPr>
             <a:r>
-              <a:rPr lang="en-US" sz="1700" dirty="0">
+              <a:rPr lang="en-US" sz="2000" dirty="0">
                 <a:solidFill>
                   <a:srgbClr val="141B26"/>
                 </a:solidFill>
               </a:rPr>
               <a:t>Pathogens are microorganisms that get into the body and change how it works.</a:t>
             </a:r>
-            <a:endParaRPr lang="en-US" sz="1700" dirty="0"/>
-          </a:p>
-          <a:p>
-            <a:pPr marL="228600" indent="-228600">
+            <a:endParaRPr lang="en-US" sz="2000" dirty="0"/>
+          </a:p>
+          <a:p>
+            <a:pPr marL="304800" indent="-304800">
               <a:spcAft>
-                <a:spcPts val="600"/>
+                <a:spcPts val="800"/>
               </a:spcAft>
               <a:buSzPct val="100000"/>
               <a:buChar char="•"/>
             </a:pPr>
             <a:r>
-              <a:rPr lang="en-US" sz="1700" dirty="0">
+              <a:rPr lang="en-US" sz="2000" dirty="0">
                 <a:solidFill>
                   <a:srgbClr val="141B26"/>
                 </a:solidFill>
               </a:rPr>
               <a:t>They include bacteria, fungi, protoctists and viruses.</a:t>
             </a:r>
-            <a:endParaRPr lang="en-US" sz="1700" dirty="0"/>
-          </a:p>
-          <a:p>
-            <a:pPr marL="228600" indent="-228600">
+            <a:endParaRPr lang="en-US" sz="2000" dirty="0"/>
+          </a:p>
+          <a:p>
+            <a:pPr marL="304800" indent="-304800">
               <a:spcAft>
-                <a:spcPts val="600"/>
+                <a:spcPts val="800"/>
               </a:spcAft>
               <a:buSzPct val="100000"/>
               <a:buChar char="•"/>
             </a:pPr>
             <a:r>
-              <a:rPr lang="en-US" sz="1700" dirty="0">
+              <a:rPr lang="en-US" sz="2000" dirty="0">
                 <a:solidFill>
                   <a:srgbClr val="141B26"/>
                 </a:solidFill>
               </a:rPr>
               <a:t>The obvious effects of a disease are its symptoms: a rash, a raised temperature, a cough.</a:t>
             </a:r>
-            <a:endParaRPr lang="en-US" sz="1700" dirty="0"/>
-          </a:p>
-          <a:p>
-            <a:pPr marL="228600" indent="-228600">
+            <a:endParaRPr lang="en-US" sz="2000" dirty="0"/>
+          </a:p>
+          <a:p>
+            <a:pPr marL="304800" indent="-304800">
               <a:spcAft>
-                <a:spcPts val="600"/>
+                <a:spcPts val="800"/>
               </a:spcAft>
               <a:buSzPct val="100000"/>
               <a:buChar char="•"/>
             </a:pPr>
             <a:r>
-              <a:rPr lang="en-US" sz="1700" dirty="0">
+              <a:rPr lang="en-US" sz="2000" dirty="0">
                 <a:solidFill>
                   <a:srgbClr val="141B26"/>
                 </a:solidFill>
               </a:rPr>
               <a:t>In richer countries, most deaths are now from changes inside the body, not from infections.</a:t>
             </a:r>
-            <a:endParaRPr lang="en-US" sz="1700" dirty="0"/>
+            <a:endParaRPr lang="en-US" sz="2000" dirty="0"/>
           </a:p>
         </p:txBody>
       </p:sp>
@@ -6390,16 +6295,14 @@
           <a:ln/>
         </p:spPr>
         <p:txBody>
-          <a:bodyPr wrap="square" lIns="0" tIns="0" rIns="0" bIns="0" rtlCol="0" anchor="ctr">
-            <a:normAutofit/>
-          </a:bodyPr>
+          <a:bodyPr wrap="square" lIns="0" tIns="0" rIns="0" bIns="0" rtlCol="0" anchor="ctr"/>
           <a:lstStyle/>
           <a:p>
             <a:pPr indent="0" marL="0">
               <a:buNone/>
             </a:pPr>
             <a:r>
-              <a:rPr lang="en-US" sz="1400" b="1" dirty="0">
+              <a:rPr lang="en-US" sz="1700" b="1" dirty="0">
                 <a:solidFill>
                   <a:srgbClr val="7B3A8E"/>
                 </a:solidFill>
@@ -6410,14 +6313,14 @@
               <a:buNone/>
             </a:pPr>
             <a:r>
-              <a:rPr lang="en-US" sz="1400" dirty="0">
+              <a:rPr lang="en-US" sz="1700" dirty="0">
                 <a:solidFill>
                   <a:srgbClr val="141B26"/>
                 </a:solidFill>
               </a:rPr>
               <a:t>A pathogen is a microorganism that causes disease.</a:t>
             </a:r>
-            <a:endParaRPr lang="en-US" sz="1400" dirty="0"/>
+            <a:endParaRPr lang="en-US" sz="1700" dirty="0"/>
           </a:p>
         </p:txBody>
       </p:sp>
@@ -6617,14 +6520,14 @@
               <a:buNone/>
             </a:pPr>
             <a:r>
-              <a:rPr lang="en-US" sz="1400" i="1" dirty="0">
+              <a:rPr lang="en-US" sz="1600" i="1" dirty="0">
                 <a:solidFill>
                   <a:srgbClr val="5B6574"/>
                 </a:solidFill>
               </a:rPr>
               <a:t>Mini whiteboards. One answer each, then we check.</a:t>
             </a:r>
-            <a:endParaRPr lang="en-US" sz="1400" dirty="0"/>
+            <a:endParaRPr lang="en-US" sz="1600" dirty="0"/>
           </a:p>
         </p:txBody>
       </p:sp>
@@ -6673,16 +6576,14 @@
           <a:ln/>
         </p:spPr>
         <p:txBody>
-          <a:bodyPr wrap="square" lIns="0" tIns="0" rIns="0" bIns="0" rtlCol="0" anchor="ctr">
-            <a:normAutofit/>
-          </a:bodyPr>
+          <a:bodyPr wrap="square" lIns="0" tIns="0" rIns="0" bIns="0" rtlCol="0" anchor="ctr"/>
           <a:lstStyle/>
           <a:p>
             <a:pPr indent="0" marL="0">
               <a:buNone/>
             </a:pPr>
             <a:r>
-              <a:rPr lang="en-US" sz="1600" b="1" dirty="0">
+              <a:rPr lang="en-US" sz="2000" b="1" dirty="0">
                 <a:solidFill>
                   <a:srgbClr val="7B3A8E"/>
                 </a:solidFill>
@@ -6693,14 +6594,14 @@
               <a:buNone/>
             </a:pPr>
             <a:r>
-              <a:rPr lang="en-US" sz="1600" dirty="0">
+              <a:rPr lang="en-US" sz="2000" dirty="0">
                 <a:solidFill>
                   <a:srgbClr val="141B26"/>
                 </a:solidFill>
               </a:rPr>
               <a:t>Scurvy is caused by too little vitamin C. Which type of disease is it?</a:t>
             </a:r>
-            <a:endParaRPr lang="en-US" sz="1600" dirty="0"/>
+            <a:endParaRPr lang="en-US" sz="2000" dirty="0"/>
           </a:p>
         </p:txBody>
       </p:sp>
@@ -6749,16 +6650,14 @@
           <a:ln/>
         </p:spPr>
         <p:txBody>
-          <a:bodyPr wrap="square" lIns="0" tIns="0" rIns="0" bIns="0" rtlCol="0" anchor="ctr">
-            <a:normAutofit/>
-          </a:bodyPr>
+          <a:bodyPr wrap="square" lIns="0" tIns="0" rIns="0" bIns="0" rtlCol="0" anchor="ctr"/>
           <a:lstStyle/>
           <a:p>
             <a:pPr indent="0" marL="0">
               <a:buNone/>
             </a:pPr>
             <a:r>
-              <a:rPr lang="en-US" sz="1600" b="1" dirty="0">
+              <a:rPr lang="en-US" sz="2000" b="1" dirty="0">
                 <a:solidFill>
                   <a:srgbClr val="7B3A8E"/>
                 </a:solidFill>
@@ -6769,14 +6668,14 @@
               <a:buNone/>
             </a:pPr>
             <a:r>
-              <a:rPr lang="en-US" sz="1600" dirty="0">
+              <a:rPr lang="en-US" sz="2000" dirty="0">
                 <a:solidFill>
                   <a:srgbClr val="141B26"/>
                 </a:solidFill>
               </a:rPr>
               <a:t>Flu is caused by a virus. Which type of disease is it?</a:t>
             </a:r>
-            <a:endParaRPr lang="en-US" sz="1600" dirty="0"/>
+            <a:endParaRPr lang="en-US" sz="2000" dirty="0"/>
           </a:p>
         </p:txBody>
       </p:sp>
@@ -6825,16 +6724,14 @@
           <a:ln/>
         </p:spPr>
         <p:txBody>
-          <a:bodyPr wrap="square" lIns="0" tIns="0" rIns="0" bIns="0" rtlCol="0" anchor="ctr">
-            <a:normAutofit/>
-          </a:bodyPr>
+          <a:bodyPr wrap="square" lIns="0" tIns="0" rIns="0" bIns="0" rtlCol="0" anchor="ctr"/>
           <a:lstStyle/>
           <a:p>
             <a:pPr indent="0" marL="0">
               <a:buNone/>
             </a:pPr>
             <a:r>
-              <a:rPr lang="en-US" sz="1600" b="1" dirty="0">
+              <a:rPr lang="en-US" sz="2000" b="1" dirty="0">
                 <a:solidFill>
                   <a:srgbClr val="7B3A8E"/>
                 </a:solidFill>
@@ -6845,14 +6742,14 @@
               <a:buNone/>
             </a:pPr>
             <a:r>
-              <a:rPr lang="en-US" sz="1600" dirty="0">
+              <a:rPr lang="en-US" sz="2000" dirty="0">
                 <a:solidFill>
                   <a:srgbClr val="141B26"/>
                 </a:solidFill>
               </a:rPr>
               <a:t>Can you catch type 1 diabetes from a friend? Yes or no.</a:t>
             </a:r>
-            <a:endParaRPr lang="en-US" sz="1600" dirty="0"/>
+            <a:endParaRPr lang="en-US" sz="2000" dirty="0"/>
           </a:p>
         </p:txBody>
       </p:sp>
@@ -6901,16 +6798,14 @@
           <a:ln/>
         </p:spPr>
         <p:txBody>
-          <a:bodyPr wrap="square" lIns="0" tIns="0" rIns="0" bIns="0" rtlCol="0" anchor="ctr">
-            <a:normAutofit/>
-          </a:bodyPr>
+          <a:bodyPr wrap="square" lIns="0" tIns="0" rIns="0" bIns="0" rtlCol="0" anchor="ctr"/>
           <a:lstStyle/>
           <a:p>
             <a:pPr indent="0" marL="0">
               <a:buNone/>
             </a:pPr>
             <a:r>
-              <a:rPr lang="en-US" sz="1600" b="1" dirty="0">
+              <a:rPr lang="en-US" sz="2000" b="1" dirty="0">
                 <a:solidFill>
                   <a:srgbClr val="7B3A8E"/>
                 </a:solidFill>
@@ -6921,14 +6816,14 @@
               <a:buNone/>
             </a:pPr>
             <a:r>
-              <a:rPr lang="en-US" sz="1600" dirty="0">
+              <a:rPr lang="en-US" sz="2000" dirty="0">
                 <a:solidFill>
                   <a:srgbClr val="141B26"/>
                 </a:solidFill>
               </a:rPr>
               <a:t>Name one kingdom of organisms that includes pathogens.</a:t>
             </a:r>
-            <a:endParaRPr lang="en-US" sz="1600" dirty="0"/>
+            <a:endParaRPr lang="en-US" sz="2000" dirty="0"/>
           </a:p>
         </p:txBody>
       </p:sp>
@@ -6977,16 +6872,14 @@
           <a:ln/>
         </p:spPr>
         <p:txBody>
-          <a:bodyPr wrap="square" lIns="0" tIns="0" rIns="0" bIns="0" rtlCol="0" anchor="ctr">
-            <a:normAutofit/>
-          </a:bodyPr>
+          <a:bodyPr wrap="square" lIns="0" tIns="0" rIns="0" bIns="0" rtlCol="0" anchor="ctr"/>
           <a:lstStyle/>
           <a:p>
             <a:pPr indent="0" marL="0">
               <a:buNone/>
             </a:pPr>
             <a:r>
-              <a:rPr lang="en-US" sz="1600" b="1" dirty="0">
+              <a:rPr lang="en-US" sz="2000" b="1" dirty="0">
                 <a:solidFill>
                   <a:srgbClr val="7B3A8E"/>
                 </a:solidFill>
@@ -6997,14 +6890,14 @@
               <a:buNone/>
             </a:pPr>
             <a:r>
-              <a:rPr lang="en-US" sz="1600" dirty="0">
+              <a:rPr lang="en-US" sz="2000" dirty="0">
                 <a:solidFill>
                   <a:srgbClr val="141B26"/>
                 </a:solidFill>
               </a:rPr>
               <a:t>Give one symptom of chickenpox.</a:t>
             </a:r>
-            <a:endParaRPr lang="en-US" sz="1600" dirty="0"/>
+            <a:endParaRPr lang="en-US" sz="2000" dirty="0"/>
           </a:p>
         </p:txBody>
       </p:sp>
@@ -7333,23 +7226,21 @@
           <a:ln/>
         </p:spPr>
         <p:txBody>
-          <a:bodyPr wrap="square" lIns="0" tIns="0" rIns="0" bIns="0" rtlCol="0" anchor="t">
-            <a:normAutofit/>
-          </a:bodyPr>
+          <a:bodyPr wrap="square" lIns="0" tIns="0" rIns="0" bIns="0" rtlCol="0" anchor="t"/>
           <a:lstStyle/>
           <a:p>
             <a:pPr indent="0" marL="0">
               <a:buNone/>
             </a:pPr>
             <a:r>
-              <a:rPr lang="en-US" sz="1700" dirty="0">
+              <a:rPr lang="en-US" sz="2000" dirty="0">
                 <a:solidFill>
                   <a:srgbClr val="141B26"/>
                 </a:solidFill>
               </a:rPr>
               <a:t>Core: match each type of disease to its example, then tick communicable or non-communicable.</a:t>
             </a:r>
-            <a:endParaRPr lang="en-US" sz="1700" dirty="0"/>
+            <a:endParaRPr lang="en-US" sz="2000" dirty="0"/>
           </a:p>
         </p:txBody>
       </p:sp>
@@ -7432,23 +7323,21 @@
           <a:ln/>
         </p:spPr>
         <p:txBody>
-          <a:bodyPr wrap="square" lIns="0" tIns="0" rIns="0" bIns="0" rtlCol="0" anchor="t">
-            <a:normAutofit/>
-          </a:bodyPr>
+          <a:bodyPr wrap="square" lIns="0" tIns="0" rIns="0" bIns="0" rtlCol="0" anchor="t"/>
           <a:lstStyle/>
           <a:p>
             <a:pPr indent="0" marL="0">
               <a:buNone/>
             </a:pPr>
             <a:r>
-              <a:rPr lang="en-US" sz="1700" dirty="0">
+              <a:rPr lang="en-US" sz="2000" dirty="0">
                 <a:solidFill>
                   <a:srgbClr val="141B26"/>
                 </a:solidFill>
               </a:rPr>
               <a:t>Core: fill the gaps using the word bank; decide what type of disease anaemia is.</a:t>
             </a:r>
-            <a:endParaRPr lang="en-US" sz="1700" dirty="0"/>
+            <a:endParaRPr lang="en-US" sz="2000" dirty="0"/>
           </a:p>
         </p:txBody>
       </p:sp>
@@ -7531,23 +7420,21 @@
           <a:ln/>
         </p:spPr>
         <p:txBody>
-          <a:bodyPr wrap="square" lIns="0" tIns="0" rIns="0" bIns="0" rtlCol="0" anchor="t">
-            <a:normAutofit/>
-          </a:bodyPr>
+          <a:bodyPr wrap="square" lIns="0" tIns="0" rIns="0" bIns="0" rtlCol="0" anchor="t"/>
           <a:lstStyle/>
           <a:p>
             <a:pPr indent="0" marL="0">
               <a:buNone/>
             </a:pPr>
             <a:r>
-              <a:rPr lang="en-US" sz="1700" dirty="0">
+              <a:rPr lang="en-US" sz="2000" dirty="0">
                 <a:solidFill>
                   <a:srgbClr val="141B26"/>
                 </a:solidFill>
               </a:rPr>
               <a:t>Stretch: write definitions; explain why polio stops muscles working.</a:t>
             </a:r>
-            <a:endParaRPr lang="en-US" sz="1700" dirty="0"/>
+            <a:endParaRPr lang="en-US" sz="2000" dirty="0"/>
           </a:p>
         </p:txBody>
       </p:sp>
@@ -7630,23 +7517,21 @@
           <a:ln/>
         </p:spPr>
         <p:txBody>
-          <a:bodyPr wrap="square" lIns="0" tIns="0" rIns="0" bIns="0" rtlCol="0" anchor="t">
-            <a:normAutofit/>
-          </a:bodyPr>
+          <a:bodyPr wrap="square" lIns="0" tIns="0" rIns="0" bIns="0" rtlCol="0" anchor="t"/>
           <a:lstStyle/>
           <a:p>
             <a:pPr indent="0" marL="0">
               <a:buNone/>
             </a:pPr>
             <a:r>
-              <a:rPr lang="en-US" sz="1700" dirty="0">
+              <a:rPr lang="en-US" sz="2000" dirty="0">
                 <a:solidFill>
                   <a:srgbClr val="141B26"/>
                 </a:solidFill>
               </a:rPr>
               <a:t>Challenge: why are most deaths in richer countries now non-communicable? How do medicines get into cells?</a:t>
             </a:r>
-            <a:endParaRPr lang="en-US" sz="1700" dirty="0"/>
+            <a:endParaRPr lang="en-US" sz="2000" dirty="0"/>
           </a:p>
         </p:txBody>
       </p:sp>
@@ -7729,23 +7614,21 @@
           <a:ln/>
         </p:spPr>
         <p:txBody>
-          <a:bodyPr wrap="square" lIns="0" tIns="0" rIns="0" bIns="0" rtlCol="0" anchor="t">
-            <a:normAutofit/>
-          </a:bodyPr>
+          <a:bodyPr wrap="square" lIns="0" tIns="0" rIns="0" bIns="0" rtlCol="0" anchor="t"/>
           <a:lstStyle/>
           <a:p>
             <a:pPr indent="0" marL="0">
               <a:buNone/>
             </a:pPr>
             <a:r>
-              <a:rPr lang="en-US" sz="1700" dirty="0">
+              <a:rPr lang="en-US" sz="2000" dirty="0">
                 <a:solidFill>
                   <a:srgbClr val="141B26"/>
                 </a:solidFill>
               </a:rPr>
               <a:t>Finished? Answer the My thinking question.</a:t>
             </a:r>
-            <a:endParaRPr lang="en-US" sz="1700" dirty="0"/>
+            <a:endParaRPr lang="en-US" sz="2000" dirty="0"/>
           </a:p>
         </p:txBody>
       </p:sp>
@@ -7774,14 +7657,14 @@
               <a:buNone/>
             </a:pPr>
             <a:r>
-              <a:rPr lang="en-US" sz="1300" i="1" dirty="0">
+              <a:rPr lang="en-US" sz="1500" i="1" dirty="0">
                 <a:solidFill>
                   <a:srgbClr val="5B6574"/>
                 </a:solidFill>
               </a:rPr>
               <a:t>Use the key words box. Write the type of disease, not just the name of the disease.</a:t>
             </a:r>
-            <a:endParaRPr lang="en-US" sz="1300" dirty="0"/>
+            <a:endParaRPr lang="en-US" sz="1500" dirty="0"/>
           </a:p>
         </p:txBody>
       </p:sp>
